--- a/Day_3_Slides.pptx
+++ b/Day_3_Slides.pptx
@@ -14,7 +14,6 @@
     <p:sldId id="262" r:id="rId13"/>
     <p:sldId id="263" r:id="rId14"/>
     <p:sldId id="264" r:id="rId15"/>
-    <p:sldId id="265" r:id="rId16"/>
   </p:sldIdLst>
   <p:sldSz cx="12191695" cy="6858000" type="screen4x3"/>
   <p:notesSz cx="6858000" cy="9144000"/>
@@ -3220,7 +3219,7 @@
         <p:spPr>
           <a:xfrm>
             <a:off x="548640" y="3291840"/>
-            <a:ext cx="10972800" cy="2926080"/>
+            <a:ext cx="10972800" cy="3108960"/>
           </a:xfrm>
           <a:prstGeom prst="rect">
             <a:avLst/>
@@ -3241,7 +3240,7 @@
                 </a:solidFill>
                 <a:latin typeface="Calibri"/>
               </a:rPr>
-              <a:t>Math Objective: determine multiplicity of each zero; predict cross/touch from factored form.</a:t>
+              <a:t>Essential Question:</a:t>
             </a:r>
           </a:p>
           <a:p>
@@ -3253,7 +3252,7 @@
                 </a:solidFill>
                 <a:latin typeface="Calibri"/>
               </a:rPr>
-              <a:t>Essential Question: what does a repeated factor do to the graph, and how can you predict behavior just from factored form?</a:t>
+              <a:t>What does a repeated factor do to the graph of a polynomial,</a:t>
             </a:r>
           </a:p>
           <a:p>
@@ -3265,6 +3264,30 @@
                 </a:solidFill>
                 <a:latin typeface="Calibri"/>
               </a:rPr>
+              <a:t>and how can you predict the behavior at every zero just by looking</a:t>
+            </a:r>
+          </a:p>
+          <a:p>
+            <a:pPr algn="l"/>
+            <a:r>
+              <a:rPr sz="2000" b="0">
+                <a:solidFill>
+                  <a:srgbClr val="DDEEFF"/>
+                </a:solidFill>
+                <a:latin typeface="Calibri"/>
+              </a:rPr>
+              <a:t>at the factored form?</a:t>
+            </a:r>
+          </a:p>
+          <a:p>
+            <a:pPr algn="l"/>
+            <a:r>
+              <a:rPr sz="2000" b="0">
+                <a:solidFill>
+                  <a:srgbClr val="DDEEFF"/>
+                </a:solidFill>
+                <a:latin typeface="Calibri"/>
+              </a:rPr>
               <a:t/>
             </a:r>
           </a:p>
@@ -3277,7 +3300,7 @@
                 </a:solidFill>
                 <a:latin typeface="Calibri"/>
               </a:rPr>
-              <a:t>Yesterday: g(x) = x(x − 4)² TOUCHED at x = 4. We said “we’ll name it tomorrow.”</a:t>
+              <a:t>Day 2: zeros + a point → equation (you worked BACKWARD).</a:t>
             </a:r>
           </a:p>
           <a:p>
@@ -3289,7 +3312,19 @@
                 </a:solidFill>
                 <a:latin typeface="Calibri"/>
               </a:rPr>
-              <a:t>Today is tomorrow. The word is MULTIPLICITY.</a:t>
+              <a:t>Today: when a factor appears more than once, the graph does</a:t>
+            </a:r>
+          </a:p>
+          <a:p>
+            <a:pPr algn="l"/>
+            <a:r>
+              <a:rPr sz="2000" b="0">
+                <a:solidFill>
+                  <a:srgbClr val="DDEEFF"/>
+                </a:solidFill>
+                <a:latin typeface="Calibri"/>
+              </a:rPr>
+              <a:t>something different at that zero. We’ll name it.</a:t>
             </a:r>
           </a:p>
         </p:txBody>
@@ -3324,163 +3359,7 @@
                 </a:solidFill>
                 <a:latin typeface="Calibri"/>
               </a:rPr>
-              <a:t>55-min block  ·  Tuesday F / Tuesday A / Monday A</a:t>
-            </a:r>
-          </a:p>
-        </p:txBody>
-      </p:sp>
-    </p:spTree>
-  </p:cSld>
-  <p:clrMapOvr>
-    <a:masterClrMapping/>
-  </p:clrMapOvr>
-</p:sld>
-</file>
-
-<file path=ppt/slides/slide10.xml><?xml version="1.0" encoding="utf-8"?>
-<p:sld xmlns:a="http://schemas.openxmlformats.org/drawingml/2006/main" xmlns:p="http://schemas.openxmlformats.org/presentationml/2006/main" xmlns:r="http://schemas.openxmlformats.org/officeDocument/2006/relationships">
-  <p:cSld>
-    <p:spTree>
-      <p:nvGrpSpPr>
-        <p:cNvPr id="1" name=""/>
-        <p:cNvGrpSpPr/>
-        <p:nvPr/>
-      </p:nvGrpSpPr>
-      <p:grpSpPr/>
-      <p:sp>
-        <p:nvSpPr>
-          <p:cNvPr id="2" name="Rectangle 1"/>
-          <p:cNvSpPr/>
-          <p:nvPr/>
-        </p:nvSpPr>
-        <p:spPr>
-          <a:xfrm>
-            <a:off x="0" y="0"/>
-            <a:ext cx="12191695" cy="6858000"/>
-          </a:xfrm>
-          <a:prstGeom prst="rect">
-            <a:avLst/>
-          </a:prstGeom>
-          <a:solidFill>
-            <a:srgbClr val="0B3C6C"/>
-          </a:solidFill>
-          <a:ln>
-            <a:noFill/>
-          </a:ln>
-          <a:effectLst/>
-        </p:spPr>
-        <p:style>
-          <a:lnRef idx="1">
-            <a:schemeClr val="accent1"/>
-          </a:lnRef>
-          <a:fillRef idx="3">
-            <a:schemeClr val="accent1"/>
-          </a:fillRef>
-          <a:effectRef idx="2">
-            <a:schemeClr val="accent1"/>
-          </a:effectRef>
-          <a:fontRef idx="minor">
-            <a:schemeClr val="lt1"/>
-          </a:fontRef>
-        </p:style>
-        <p:txBody>
-          <a:bodyPr rtlCol="0" anchor="ctr"/>
-          <a:lstStyle/>
-          <a:p>
-            <a:pPr algn="ctr"/>
-          </a:p>
-        </p:txBody>
-      </p:sp>
-      <p:sp>
-        <p:nvSpPr>
-          <p:cNvPr id="3" name="TextBox 2"/>
-          <p:cNvSpPr txBox="1"/>
-          <p:nvPr/>
-        </p:nvSpPr>
-        <p:spPr>
-          <a:xfrm>
-            <a:off x="548640" y="2103120"/>
-            <a:ext cx="10972800" cy="1097280"/>
-          </a:xfrm>
-          <a:prstGeom prst="rect">
-            <a:avLst/>
-          </a:prstGeom>
-          <a:noFill/>
-        </p:spPr>
-        <p:txBody>
-          <a:bodyPr wrap="square">
-            <a:spAutoFit/>
-          </a:bodyPr>
-          <a:lstStyle/>
-          <a:p>
-            <a:pPr algn="ctr"/>
-            <a:r>
-              <a:rPr sz="5200" b="1">
-                <a:solidFill>
-                  <a:srgbClr val="FFFFFF"/>
-                </a:solidFill>
-                <a:latin typeface="Calibri"/>
-              </a:rPr>
-              <a:t>Nice work.</a:t>
-            </a:r>
-          </a:p>
-        </p:txBody>
-      </p:sp>
-      <p:sp>
-        <p:nvSpPr>
-          <p:cNvPr id="4" name="TextBox 3"/>
-          <p:cNvSpPr txBox="1"/>
-          <p:nvPr/>
-        </p:nvSpPr>
-        <p:spPr>
-          <a:xfrm>
-            <a:off x="548640" y="3749039"/>
-            <a:ext cx="10972800" cy="1828800"/>
-          </a:xfrm>
-          <a:prstGeom prst="rect">
-            <a:avLst/>
-          </a:prstGeom>
-          <a:noFill/>
-        </p:spPr>
-        <p:txBody>
-          <a:bodyPr wrap="square">
-            <a:spAutoFit/>
-          </a:bodyPr>
-          <a:lstStyle/>
-          <a:p>
-            <a:pPr algn="ctr"/>
-            <a:r>
-              <a:rPr sz="2200" b="0">
-                <a:solidFill>
-                  <a:srgbClr val="DDEEFF"/>
-                </a:solidFill>
-                <a:latin typeface="Calibri"/>
-              </a:rPr>
-              <a:t>Collect:  Exit Ticket  ·  Do Now sheet  ·  Tonya error analysis</a:t>
-            </a:r>
-          </a:p>
-          <a:p>
-            <a:pPr algn="ctr"/>
-            <a:r>
-              <a:rPr sz="2200" b="0">
-                <a:solidFill>
-                  <a:srgbClr val="DDEEFF"/>
-                </a:solidFill>
-                <a:latin typeface="Calibri"/>
-              </a:rPr>
-              <a:t/>
-            </a:r>
-          </a:p>
-          <a:p>
-            <a:pPr algn="ctr"/>
-            <a:r>
-              <a:rPr sz="2200" b="0">
-                <a:solidFill>
-                  <a:srgbClr val="DDEEFF"/>
-                </a:solidFill>
-                <a:latin typeface="Calibri"/>
-              </a:rPr>
-              <a:t>Day 4 preview:  real vs. complex zeros — what if we can’t factor over the reals?</a:t>
+              <a:t>55-min lesson  ·  one DOK-3 driver</a:t>
             </a:r>
           </a:p>
         </p:txBody>
@@ -3655,7 +3534,7 @@
                 </a:solidFill>
                 <a:latin typeface="Calibri"/>
               </a:rPr>
-              <a:t>Phase 1/8  ·  Algebra 2  ·  Lesson 3-5  ·  Day 3</a:t>
+              <a:t>Phase 1/7  ·  Algebra 2  ·  Lesson 3-5  ·  Day 3</a:t>
             </a:r>
           </a:p>
         </p:txBody>
@@ -3893,7 +3772,7 @@
                 </a:solidFill>
                 <a:latin typeface="Calibri"/>
               </a:rPr>
-              <a:t>3.  k(x) = x³ (x − 2)²</a:t>
+              <a:t/>
             </a:r>
           </a:p>
           <a:p>
@@ -3905,6 +3784,18 @@
                 </a:solidFill>
                 <a:latin typeface="Calibri"/>
               </a:rPr>
+              <a:t>3.  Pattern guess:  EVEN factor count → ?    ODD factor count → ?</a:t>
+            </a:r>
+          </a:p>
+          <a:p>
+            <a:pPr algn="l"/>
+            <a:r>
+              <a:rPr sz="2400" b="0">
+                <a:solidFill>
+                  <a:srgbClr val="112233"/>
+                </a:solidFill>
+                <a:latin typeface="Calibri"/>
+              </a:rPr>
               <a:t/>
             </a:r>
           </a:p>
@@ -3917,31 +3808,7 @@
                 </a:solidFill>
                 <a:latin typeface="Calibri"/>
               </a:rPr>
-              <a:t>4.  Pattern guess: EVEN factor count → ?    ODD factor count → ?</a:t>
-            </a:r>
-          </a:p>
-          <a:p>
-            <a:pPr algn="l"/>
-            <a:r>
-              <a:rPr sz="2400" b="0">
-                <a:solidFill>
-                  <a:srgbClr val="112233"/>
-                </a:solidFill>
-                <a:latin typeface="Calibri"/>
-              </a:rPr>
-              <a:t/>
-            </a:r>
-          </a:p>
-          <a:p>
-            <a:pPr algn="l"/>
-            <a:r>
-              <a:rPr sz="2400" b="0">
-                <a:solidFill>
-                  <a:srgbClr val="112233"/>
-                </a:solidFill>
-                <a:latin typeface="Calibri"/>
-              </a:rPr>
-              <a:t>Silent · Pencil only · No Desmos · No packet</a:t>
+              <a:t>Silent  ·  Pencil only  ·  No Desmos  ·  No packet</a:t>
             </a:r>
           </a:p>
         </p:txBody>
@@ -4019,7 +3886,7 @@
                 </a:solidFill>
                 <a:latin typeface="Calibri"/>
               </a:rPr>
-              <a:t>When everyone's in:  Blooket code coming up.</a:t>
+              <a:t>When everyone’s in:  Blooket code coming up.</a:t>
             </a:r>
           </a:p>
         </p:txBody>
@@ -4194,7 +4061,7 @@
                 </a:solidFill>
                 <a:latin typeface="Calibri"/>
               </a:rPr>
-              <a:t>Phase 2/8  ·  Algebra 2  ·  Lesson 3-5  ·  Day 3</a:t>
+              <a:t>Phase 2/7  ·  Algebra 2  ·  Lesson 3-5  ·  Day 3</a:t>
             </a:r>
           </a:p>
         </p:txBody>
@@ -4653,7 +4520,7 @@
                 </a:solidFill>
                 <a:latin typeface="Calibri"/>
               </a:rPr>
-              <a:t>Blooket  —  Multiplicity Warm-Up</a:t>
+              <a:t>Blooket  —  Rule Recall</a:t>
             </a:r>
           </a:p>
         </p:txBody>
@@ -4688,7 +4555,7 @@
                 </a:solidFill>
                 <a:latin typeface="Calibri"/>
               </a:rPr>
-              <a:t>Phase 3/8  ·  Algebra 2  ·  Lesson 3-5  ·  Day 3</a:t>
+              <a:t>Phase 3/7  ·  Algebra 2  ·  Lesson 3-5  ·  Day 3</a:t>
             </a:r>
           </a:p>
         </p:txBody>
@@ -4866,7 +4733,7 @@
                 </a:solidFill>
                 <a:latin typeface="Calibri"/>
               </a:rPr>
-              <a:t>Today’s targeted Blooket (NEW):</a:t>
+              <a:t>Pure rule recall today. The rules you’ll need in 30 minutes:</a:t>
             </a:r>
           </a:p>
           <a:p>
@@ -4878,7 +4745,7 @@
                 </a:solidFill>
                 <a:latin typeface="Calibri"/>
               </a:rPr>
-              <a:t>  •  Reading multiplicity from factored form</a:t>
+              <a:t/>
             </a:r>
           </a:p>
           <a:p>
@@ -4890,7 +4757,7 @@
                 </a:solidFill>
                 <a:latin typeface="Calibri"/>
               </a:rPr>
-              <a:t>  •  Even vs. odd behavior (cross vs. touch)</a:t>
+              <a:t>  •  Multiplicity = exponent on the factor</a:t>
             </a:r>
           </a:p>
           <a:p>
@@ -4902,7 +4769,7 @@
                 </a:solidFill>
                 <a:latin typeface="Calibri"/>
               </a:rPr>
-              <a:t>  •  Matching graphs to equations</a:t>
+              <a:t>  •  EVEN multiplicity → graph TOUCHES and turns</a:t>
             </a:r>
           </a:p>
           <a:p>
@@ -4914,7 +4781,7 @@
                 </a:solidFill>
                 <a:latin typeface="Calibri"/>
               </a:rPr>
-              <a:t>  •  2 recall questions from Day 2</a:t>
+              <a:t>  •  ODD multiplicity → graph CROSSES</a:t>
             </a:r>
           </a:p>
           <a:p>
@@ -4926,6 +4793,18 @@
                 </a:solidFill>
                 <a:latin typeface="Calibri"/>
               </a:rPr>
+              <a:t>  •  Day 2 recall: zero ⇔ factor = 0  /  zero at c gives (x − c)</a:t>
+            </a:r>
+          </a:p>
+          <a:p>
+            <a:pPr algn="l"/>
+            <a:r>
+              <a:rPr sz="2400" b="0">
+                <a:solidFill>
+                  <a:srgbClr val="112233"/>
+                </a:solidFill>
+                <a:latin typeface="Calibri"/>
+              </a:rPr>
               <a:t/>
             </a:r>
           </a:p>
@@ -4938,7 +4817,7 @@
                 </a:solidFill>
                 <a:latin typeface="Calibri"/>
               </a:rPr>
-              <a:t>Focus. Play fast. Teacher is watching the dashboard.</a:t>
+              <a:t>Play fast.  Teacher is watching the dashboard.</a:t>
             </a:r>
           </a:p>
         </p:txBody>
@@ -5016,7 +4895,7 @@
                 </a:solidFill>
                 <a:latin typeface="Calibri"/>
               </a:rPr>
-              <a:t>Close game.  “Packets out. Pull your Do Now sheet. Next we name the thing.”</a:t>
+              <a:t>Close game at 0.  “Pull out your Do Now. Packet too.”</a:t>
             </a:r>
           </a:p>
         </p:txBody>
@@ -5156,7 +5035,7 @@
                 </a:solidFill>
                 <a:latin typeface="Calibri"/>
               </a:rPr>
-              <a:t>Launch  —  Name It:  MULTIPLICITY</a:t>
+              <a:t>Launch  —  Name the Pattern</a:t>
             </a:r>
           </a:p>
         </p:txBody>
@@ -5191,7 +5070,7 @@
                 </a:solidFill>
                 <a:latin typeface="Calibri"/>
               </a:rPr>
-              <a:t>Phase 4/8  ·  Algebra 2  ·  Lesson 3-5  ·  Day 3</a:t>
+              <a:t>Phase 4/7  ·  Algebra 2  ·  Lesson 3-5  ·  Day 3</a:t>
             </a:r>
           </a:p>
         </p:txBody>
@@ -5334,7 +5213,7 @@
                 </a:solidFill>
                 <a:latin typeface="Calibri"/>
               </a:rPr>
-              <a:t>8 min</a:t>
+              <a:t>12 min</a:t>
             </a:r>
           </a:p>
         </p:txBody>
@@ -5363,19 +5242,19 @@
           <a:p>
             <a:pPr algn="l"/>
             <a:r>
-              <a:rPr sz="2400" b="0">
+              <a:rPr sz="2200" b="0">
                 <a:solidFill>
                   <a:srgbClr val="112233"/>
                 </a:solidFill>
                 <a:latin typeface="Calibri"/>
               </a:rPr>
-              <a:t>Yesterday:  g(x) = x (x − 4)²   touched at x = 4.</a:t>
-            </a:r>
-          </a:p>
-          <a:p>
-            <a:pPr algn="l"/>
-            <a:r>
-              <a:rPr sz="2400" b="0">
+              <a:t>1.  Pull out your Do Now.  Cold-call the pattern in #3.</a:t>
+            </a:r>
+          </a:p>
+          <a:p>
+            <a:pPr algn="l"/>
+            <a:r>
+              <a:rPr sz="2200" b="0">
                 <a:solidFill>
                   <a:srgbClr val="112233"/>
                 </a:solidFill>
@@ -5387,85 +5266,97 @@
           <a:p>
             <a:pPr algn="l"/>
             <a:r>
-              <a:rPr sz="2400" b="0">
+              <a:rPr sz="2200" b="0">
                 <a:solidFill>
                   <a:srgbClr val="112233"/>
                 </a:solidFill>
                 <a:latin typeface="Calibri"/>
               </a:rPr>
-              <a:t>MULTIPLICITY  =  how many times a factor appears in factored form.</a:t>
-            </a:r>
-          </a:p>
-          <a:p>
-            <a:pPr algn="l"/>
-            <a:r>
-              <a:rPr sz="2400" b="0">
+              <a:t>2.  In Desmos — type each, watch what happens at x = 1:</a:t>
+            </a:r>
+          </a:p>
+          <a:p>
+            <a:pPr algn="l"/>
+            <a:r>
+              <a:rPr sz="2200" b="0">
                 <a:solidFill>
                   <a:srgbClr val="112233"/>
                 </a:solidFill>
                 <a:latin typeface="Calibri"/>
               </a:rPr>
+              <a:t>      (a)  y = (x − 1)¹        (b)  y = (x − 1)²</a:t>
+            </a:r>
+          </a:p>
+          <a:p>
+            <a:pPr algn="l"/>
+            <a:r>
+              <a:rPr sz="2200" b="0">
+                <a:solidFill>
+                  <a:srgbClr val="112233"/>
+                </a:solidFill>
+                <a:latin typeface="Calibri"/>
+              </a:rPr>
+              <a:t>      (c)  y = (x − 1)³        (d)  y = (x − 1)⁴</a:t>
+            </a:r>
+          </a:p>
+          <a:p>
+            <a:pPr algn="l"/>
+            <a:r>
+              <a:rPr sz="2200" b="0">
+                <a:solidFill>
+                  <a:srgbClr val="112233"/>
+                </a:solidFill>
+                <a:latin typeface="Calibri"/>
+              </a:rPr>
               <a:t/>
             </a:r>
           </a:p>
           <a:p>
             <a:pPr algn="l"/>
             <a:r>
-              <a:rPr sz="2400" b="0">
+              <a:rPr sz="2200" b="0">
                 <a:solidFill>
                   <a:srgbClr val="112233"/>
                 </a:solidFill>
                 <a:latin typeface="Calibri"/>
               </a:rPr>
-              <a:t>f(x) = (x − 4)² (x + 1)</a:t>
-            </a:r>
-          </a:p>
-          <a:p>
-            <a:pPr algn="l"/>
-            <a:r>
-              <a:rPr sz="2400" b="0">
+              <a:t>3.  THE WORD:  the number of times a factor appears in the factored</a:t>
+            </a:r>
+          </a:p>
+          <a:p>
+            <a:pPr algn="l"/>
+            <a:r>
+              <a:rPr sz="2200" b="0">
                 <a:solidFill>
                   <a:srgbClr val="112233"/>
                 </a:solidFill>
                 <a:latin typeface="Calibri"/>
               </a:rPr>
-              <a:t>   •  x = 4:   factor (x − 4) appears 2 times  →  multiplicity 2</a:t>
-            </a:r>
-          </a:p>
-          <a:p>
-            <a:pPr algn="l"/>
-            <a:r>
-              <a:rPr sz="2400" b="0">
+              <a:t>    form is its  MULTIPLICITY.   (x − 1)²  has multiplicity 2 at x = 1.</a:t>
+            </a:r>
+          </a:p>
+          <a:p>
+            <a:pPr algn="l"/>
+            <a:r>
+              <a:rPr sz="2200" b="0">
                 <a:solidFill>
                   <a:srgbClr val="112233"/>
                 </a:solidFill>
                 <a:latin typeface="Calibri"/>
               </a:rPr>
-              <a:t>   •  x = −1:  factor (x + 1) appears 1 time   →  multiplicity 1</a:t>
-            </a:r>
-          </a:p>
-          <a:p>
-            <a:pPr algn="l"/>
-            <a:r>
-              <a:rPr sz="2400" b="0">
+              <a:t/>
+            </a:r>
+          </a:p>
+          <a:p>
+            <a:pPr algn="l"/>
+            <a:r>
+              <a:rPr sz="2200" b="0">
                 <a:solidFill>
                   <a:srgbClr val="112233"/>
                 </a:solidFill>
                 <a:latin typeface="Calibri"/>
               </a:rPr>
-              <a:t/>
-            </a:r>
-          </a:p>
-          <a:p>
-            <a:pPr algn="l"/>
-            <a:r>
-              <a:rPr sz="2400" b="0">
-                <a:solidFill>
-                  <a:srgbClr val="112233"/>
-                </a:solidFill>
-                <a:latin typeface="Calibri"/>
-              </a:rPr>
-              <a:t>Build the Frayer on your packet:  Definition  /  Characteristics  /  Example  /  Non-example</a:t>
+              <a:t>4.  Fill the T-chart on your packet:  ODD  vs.  EVEN.</a:t>
             </a:r>
           </a:p>
         </p:txBody>
@@ -5543,7 +5434,7 @@
                 </a:solidFill>
                 <a:latin typeface="Calibri"/>
               </a:rPr>
-              <a:t>Desmos next.  We’ll test (x − 1) with exponents 1, 2, 3, 4. Watch x = 1.</a:t>
+              <a:t>“Packets to Practice. Three quick items.”</a:t>
             </a:r>
           </a:p>
         </p:txBody>
@@ -5683,7 +5574,7 @@
                 </a:solidFill>
                 <a:latin typeface="Calibri"/>
               </a:rPr>
-              <a:t>Explore  —  Desmos: (x − 1)ⁿ</a:t>
+              <a:t>Practice  —  Try It A–C</a:t>
             </a:r>
           </a:p>
         </p:txBody>
@@ -5718,7 +5609,7 @@
                 </a:solidFill>
                 <a:latin typeface="Calibri"/>
               </a:rPr>
-              <a:t>Phase 5/8  ·  Algebra 2  ·  Lesson 3-5  ·  Day 3</a:t>
+              <a:t>Phase 5/7  ·  Algebra 2  ·  Lesson 3-5  ·  Day 3</a:t>
             </a:r>
           </a:p>
         </p:txBody>
@@ -5732,7 +5623,7 @@
         <p:spPr>
           <a:xfrm>
             <a:off x="9418320" y="365760"/>
-            <a:ext cx="960120" cy="320040"/>
+            <a:ext cx="1060704" cy="320040"/>
           </a:xfrm>
           <a:prstGeom prst="roundRect">
             <a:avLst>
@@ -5772,7 +5663,7 @@
                 </a:solidFill>
                 <a:latin typeface="Calibri"/>
               </a:rPr>
-              <a:t>Explore</a:t>
+              <a:t>Practice</a:t>
             </a:r>
           </a:p>
         </p:txBody>
@@ -5785,8 +5676,8 @@
         </p:nvSpPr>
         <p:spPr>
           <a:xfrm>
-            <a:off x="10451592" y="365760"/>
-            <a:ext cx="960120" cy="320040"/>
+            <a:off x="10552176" y="365760"/>
+            <a:ext cx="758952" cy="320040"/>
           </a:xfrm>
           <a:prstGeom prst="roundRect">
             <a:avLst>
@@ -5826,7 +5717,7 @@
                 </a:solidFill>
                 <a:latin typeface="Calibri"/>
               </a:rPr>
-              <a:t>DOK 2–3</a:t>
+              <a:t>DOK 2</a:t>
             </a:r>
           </a:p>
         </p:txBody>
@@ -5861,7 +5752,7 @@
                 </a:solidFill>
                 <a:latin typeface="Calibri"/>
               </a:rPr>
-              <a:t>15 min</a:t>
+              <a:t>10 min</a:t>
             </a:r>
           </a:p>
         </p:txBody>
@@ -5896,7 +5787,7 @@
                 </a:solidFill>
                 <a:latin typeface="Calibri"/>
               </a:rPr>
-              <a:t>Graph each. Record what happens AT x = 1:</a:t>
+              <a:t>For each polynomial:  list zeros, multiplicity, and behavior.</a:t>
             </a:r>
           </a:p>
           <a:p>
@@ -5920,7 +5811,7 @@
                 </a:solidFill>
                 <a:latin typeface="Calibri"/>
               </a:rPr>
-              <a:t>(a)  y = (x − 1)¹     →  ?</a:t>
+              <a:t>  A.  f(x) = (x + 3)(x − 2)²</a:t>
             </a:r>
           </a:p>
           <a:p>
@@ -5932,7 +5823,7 @@
                 </a:solidFill>
                 <a:latin typeface="Calibri"/>
               </a:rPr>
-              <a:t>(b)  y = (x − 1)²     →  ?</a:t>
+              <a:t>  B.  g(x) = x² (x − 5)³</a:t>
             </a:r>
           </a:p>
           <a:p>
@@ -5944,7 +5835,7 @@
                 </a:solidFill>
                 <a:latin typeface="Calibri"/>
               </a:rPr>
-              <a:t>(c)  y = (x − 1)³     →  ?</a:t>
+              <a:t>  C.  h(x) = (x + 1)⁴ (x − 4)</a:t>
             </a:r>
           </a:p>
           <a:p>
@@ -5956,7 +5847,7 @@
                 </a:solidFill>
                 <a:latin typeface="Calibri"/>
               </a:rPr>
-              <a:t>(d)  y = (x − 1)⁴     →  ?</a:t>
+              <a:t/>
             </a:r>
           </a:p>
           <a:p>
@@ -5968,6 +5859,18 @@
                 </a:solidFill>
                 <a:latin typeface="Calibri"/>
               </a:rPr>
+              <a:t>Frame:  “The multiplicity is ____, so the graph ____ at x = ____.”</a:t>
+            </a:r>
+          </a:p>
+          <a:p>
+            <a:pPr algn="l"/>
+            <a:r>
+              <a:rPr sz="2400" b="0">
+                <a:solidFill>
+                  <a:srgbClr val="112233"/>
+                </a:solidFill>
+                <a:latin typeface="Calibri"/>
+              </a:rPr>
               <a:t/>
             </a:r>
           </a:p>
@@ -5980,31 +5883,7 @@
                 </a:solidFill>
                 <a:latin typeface="Calibri"/>
               </a:rPr>
-              <a:t>Then fill the EVEN vs. ODD T-chart.</a:t>
-            </a:r>
-          </a:p>
-          <a:p>
-            <a:pPr algn="l"/>
-            <a:r>
-              <a:rPr sz="2400" b="0">
-                <a:solidFill>
-                  <a:srgbClr val="112233"/>
-                </a:solidFill>
-                <a:latin typeface="Calibri"/>
-              </a:rPr>
-              <a:t/>
-            </a:r>
-          </a:p>
-          <a:p>
-            <a:pPr algn="l"/>
-            <a:r>
-              <a:rPr sz="2400" b="0">
-                <a:solidFill>
-                  <a:srgbClr val="112233"/>
-                </a:solidFill>
-                <a:latin typeface="Calibri"/>
-              </a:rPr>
-              <a:t>Frame:  “The multiplicity is ____, so the graph ____ at x = ____.”</a:t>
+              <a:t>Fast finishers — challenge on the board.</a:t>
             </a:r>
           </a:p>
         </p:txBody>
@@ -6082,7 +5961,7 @@
                 </a:solidFill>
                 <a:latin typeface="Calibri"/>
               </a:rPr>
-              <a:t>Bonus: (x-1)³ crosses, but HOW is that cross different from (x-1)¹? Discuss.</a:t>
+              <a:t>“Packet flip. Tonya’s graph next. Read the rules card on the page.”</a:t>
             </a:r>
           </a:p>
         </p:txBody>
@@ -6222,7 +6101,7 @@
                 </a:solidFill>
                 <a:latin typeface="Calibri"/>
               </a:rPr>
-              <a:t>Explore  —  Tonya’s Error</a:t>
+              <a:t>Explore  —  Tonya’s Graph (Error Analysis)</a:t>
             </a:r>
           </a:p>
         </p:txBody>
@@ -6257,7 +6136,7 @@
                 </a:solidFill>
                 <a:latin typeface="Calibri"/>
               </a:rPr>
-              <a:t>Phase 6/8  ·  Algebra 2  ·  Lesson 3-5  ·  Day 3</a:t>
+              <a:t>Phase 6/7  ·  Algebra 2  ·  Lesson 3-5  ·  Day 3</a:t>
             </a:r>
           </a:p>
         </p:txBody>
@@ -6400,7 +6279,7 @@
                 </a:solidFill>
                 <a:latin typeface="Calibri"/>
               </a:rPr>
-              <a:t>10 min</a:t>
+              <a:t>15 min</a:t>
             </a:r>
           </a:p>
         </p:txBody>
@@ -6429,7 +6308,7 @@
           <a:p>
             <a:pPr algn="l"/>
             <a:r>
-              <a:rPr sz="2400" b="0">
+              <a:rPr sz="2200" b="0">
                 <a:solidFill>
                   <a:srgbClr val="112233"/>
                 </a:solidFill>
@@ -6441,19 +6320,19 @@
           <a:p>
             <a:pPr algn="l"/>
             <a:r>
-              <a:rPr sz="2400" b="0">
+              <a:rPr sz="2200" b="0">
                 <a:solidFill>
                   <a:srgbClr val="112233"/>
                 </a:solidFill>
                 <a:latin typeface="Calibri"/>
               </a:rPr>
-              <a:t>She draws the graph CROSSING at x = −1 and CROSSING at x = 3.</a:t>
-            </a:r>
-          </a:p>
-          <a:p>
-            <a:pPr algn="l"/>
-            <a:r>
-              <a:rPr sz="2400" b="0">
+              <a:t>She draws the graph CROSSING at x = −1 AND CROSSING at x = 3.</a:t>
+            </a:r>
+          </a:p>
+          <a:p>
+            <a:pPr algn="l"/>
+            <a:r>
+              <a:rPr sz="2200" b="0">
                 <a:solidFill>
                   <a:srgbClr val="112233"/>
                 </a:solidFill>
@@ -6465,61 +6344,73 @@
           <a:p>
             <a:pPr algn="l"/>
             <a:r>
-              <a:rPr sz="2400" b="0">
+              <a:rPr sz="2200" b="0">
                 <a:solidFill>
                   <a:srgbClr val="112233"/>
                 </a:solidFill>
                 <a:latin typeface="Calibri"/>
               </a:rPr>
-              <a:t>(a)  What did Tonya get RIGHT?</a:t>
-            </a:r>
-          </a:p>
-          <a:p>
-            <a:pPr algn="l"/>
-            <a:r>
-              <a:rPr sz="2400" b="0">
+              <a:t>EVERYTHING YOU NEED IS ON YOUR PAGE  —  three rules + 5 steps.</a:t>
+            </a:r>
+          </a:p>
+          <a:p>
+            <a:pPr algn="l"/>
+            <a:r>
+              <a:rPr sz="2200" b="0">
                 <a:solidFill>
                   <a:srgbClr val="112233"/>
                 </a:solidFill>
                 <a:latin typeface="Calibri"/>
               </a:rPr>
-              <a:t>(b)  What did she get WRONG?   Use the word MULTIPLICITY.</a:t>
-            </a:r>
-          </a:p>
-          <a:p>
-            <a:pPr algn="l"/>
-            <a:r>
-              <a:rPr sz="2400" b="0">
+              <a:t/>
+            </a:r>
+          </a:p>
+          <a:p>
+            <a:pPr algn="l"/>
+            <a:r>
+              <a:rPr sz="2200" b="0">
                 <a:solidFill>
                   <a:srgbClr val="112233"/>
                 </a:solidFill>
                 <a:latin typeface="Calibri"/>
               </a:rPr>
-              <a:t>(c)  Defend the correct behavior at x = −1 in CER format.</a:t>
-            </a:r>
-          </a:p>
-          <a:p>
-            <a:pPr algn="l"/>
-            <a:r>
-              <a:rPr sz="2400" b="0">
+              <a:t>  Step 1  What did Tonya get RIGHT?</a:t>
+            </a:r>
+          </a:p>
+          <a:p>
+            <a:pPr algn="l"/>
+            <a:r>
+              <a:rPr sz="2200" b="0">
                 <a:solidFill>
                   <a:srgbClr val="112233"/>
                 </a:solidFill>
                 <a:latin typeface="Calibri"/>
               </a:rPr>
-              <a:t/>
-            </a:r>
-          </a:p>
-          <a:p>
-            <a:pPr algn="l"/>
-            <a:r>
-              <a:rPr sz="2400" b="0">
+              <a:t>  Step 2  What did she get WRONG?  Use “multiplicity”.</a:t>
+            </a:r>
+          </a:p>
+          <a:p>
+            <a:pPr algn="l"/>
+            <a:r>
+              <a:rPr sz="2200" b="0">
                 <a:solidFill>
                   <a:srgbClr val="112233"/>
                 </a:solidFill>
                 <a:latin typeface="Calibri"/>
               </a:rPr>
-              <a:t>Partners justify aloud using “because” / “since.”</a:t>
+              <a:t>  Step 3  Defend the correct behavior at x = −1 (sentence frame).</a:t>
+            </a:r>
+          </a:p>
+          <a:p>
+            <a:pPr algn="l"/>
+            <a:r>
+              <a:rPr sz="2200" b="0">
+                <a:solidFill>
+                  <a:srgbClr val="112233"/>
+                </a:solidFill>
+                <a:latin typeface="Calibri"/>
+              </a:rPr>
+              <a:t>  Step 4  Verify in Desmos.    Step 5  Explain to your partner.</a:t>
             </a:r>
           </a:p>
         </p:txBody>
@@ -6597,7 +6488,7 @@
                 </a:solidFill>
                 <a:latin typeface="Calibri"/>
               </a:rPr>
-              <a:t>If time short: verbal CER now, written CER = homework.</a:t>
+              <a:t>Teacher circulates.  Prompts only — “What’s the exponent on (x + 1)?”</a:t>
             </a:r>
           </a:p>
         </p:txBody>
@@ -6737,7 +6628,7 @@
                 </a:solidFill>
                 <a:latin typeface="Calibri"/>
               </a:rPr>
-              <a:t>Share / Summary</a:t>
+              <a:t>Exit Ticket  —  Summary</a:t>
             </a:r>
           </a:p>
         </p:txBody>
@@ -6772,7 +6663,7 @@
                 </a:solidFill>
                 <a:latin typeface="Calibri"/>
               </a:rPr>
-              <a:t>Phase 7/8  ·  Algebra 2  ·  Lesson 3-5  ·  Day 3</a:t>
+              <a:t>Phase 7/7  ·  Algebra 2  ·  Lesson 3-5  ·  Day 3</a:t>
             </a:r>
           </a:p>
         </p:txBody>
@@ -6786,7 +6677,7 @@
         <p:spPr>
           <a:xfrm>
             <a:off x="9418320" y="365760"/>
-            <a:ext cx="1563624" cy="320040"/>
+            <a:ext cx="1362456" cy="320040"/>
           </a:xfrm>
           <a:prstGeom prst="roundRect">
             <a:avLst>
@@ -6826,7 +6717,7 @@
                 </a:solidFill>
                 <a:latin typeface="Calibri"/>
               </a:rPr>
-              <a:t>Share/Summary</a:t>
+              <a:t>Exit Ticket</a:t>
             </a:r>
           </a:p>
         </p:txBody>
@@ -6839,8 +6730,8 @@
         </p:nvSpPr>
         <p:spPr>
           <a:xfrm>
-            <a:off x="11055096" y="365760"/>
-            <a:ext cx="758952" cy="320040"/>
+            <a:off x="10853928" y="365760"/>
+            <a:ext cx="960120" cy="320040"/>
           </a:xfrm>
           <a:prstGeom prst="roundRect">
             <a:avLst>
@@ -6880,7 +6771,7 @@
                 </a:solidFill>
                 <a:latin typeface="Calibri"/>
               </a:rPr>
-              <a:t>DOK 2</a:t>
+              <a:t>DOK 1–2</a:t>
             </a:r>
           </a:p>
         </p:txBody>
@@ -6950,7 +6841,7 @@
                 </a:solidFill>
                 <a:latin typeface="Calibri"/>
               </a:rPr>
-              <a:t>Essential Question:</a:t>
+              <a:t>1.  MULTIPLICITY = ______ on the factor.</a:t>
             </a:r>
           </a:p>
           <a:p>
@@ -6962,7 +6853,7 @@
                 </a:solidFill>
                 <a:latin typeface="Calibri"/>
               </a:rPr>
-              <a:t>What does a repeated factor do to the graph,</a:t>
+              <a:t/>
             </a:r>
           </a:p>
           <a:p>
@@ -6974,7 +6865,7 @@
                 </a:solidFill>
                 <a:latin typeface="Calibri"/>
               </a:rPr>
-              <a:t>and how do you predict each zero’s behavior just from factored form?</a:t>
+              <a:t>2.  EVEN → ______ .    ODD → ______ .</a:t>
             </a:r>
           </a:p>
           <a:p>
@@ -6998,7 +6889,7 @@
                 </a:solidFill>
                 <a:latin typeface="Calibri"/>
               </a:rPr>
-              <a:t>Language Objective check:</a:t>
+              <a:t>3.  In  p(x) = (x + 2)³ (x − 4):</a:t>
             </a:r>
           </a:p>
           <a:p>
@@ -7010,7 +6901,7 @@
                 </a:solidFill>
                 <a:latin typeface="Calibri"/>
               </a:rPr>
-              <a:t>Who used  “The multiplicity is ___, so the graph ___ at x = ___”?</a:t>
+              <a:t>      x = −2 → mult ____, behavior ______________</a:t>
             </a:r>
           </a:p>
           <a:p>
@@ -7022,6 +6913,18 @@
                 </a:solidFill>
                 <a:latin typeface="Calibri"/>
               </a:rPr>
+              <a:t>      x =  4 → mult ____, behavior ______________</a:t>
+            </a:r>
+          </a:p>
+          <a:p>
+            <a:pPr algn="l"/>
+            <a:r>
+              <a:rPr sz="2400" b="0">
+                <a:solidFill>
+                  <a:srgbClr val="112233"/>
+                </a:solidFill>
+                <a:latin typeface="Calibri"/>
+              </a:rPr>
               <a:t/>
             </a:r>
           </a:p>
@@ -7034,31 +6937,7 @@
                 </a:solidFill>
                 <a:latin typeface="Calibri"/>
               </a:rPr>
-              <a:t>Self-rating on packet:   ✓  /  partly  /  not yet</a:t>
-            </a:r>
-          </a:p>
-          <a:p>
-            <a:pPr algn="l"/>
-            <a:r>
-              <a:rPr sz="2400" b="0">
-                <a:solidFill>
-                  <a:srgbClr val="112233"/>
-                </a:solidFill>
-                <a:latin typeface="Calibri"/>
-              </a:rPr>
-              <a:t/>
-            </a:r>
-          </a:p>
-          <a:p>
-            <a:pPr algn="l"/>
-            <a:r>
-              <a:rPr sz="2400" b="0">
-                <a:solidFill>
-                  <a:srgbClr val="112233"/>
-                </a:solidFill>
-                <a:latin typeface="Calibri"/>
-              </a:rPr>
-              <a:t>Preview Day 4:  what if the quadratic won’t factor over the reals? Complex zeros.</a:t>
+              <a:t>4.  One sentence: most important thing I learned today.</a:t>
             </a:r>
           </a:p>
         </p:txBody>
@@ -7136,7 +7015,7 @@
                 </a:solidFill>
                 <a:latin typeface="Calibri"/>
               </a:rPr>
-              <a:t>“Pencils up. Exit ticket. Use the frame.”</a:t>
+              <a:t>Packets to the front. Pack up. See you next class.</a:t>
             </a:r>
           </a:p>
         </p:txBody>
@@ -7174,7 +7053,7 @@
             <a:avLst/>
           </a:prstGeom>
           <a:solidFill>
-            <a:srgbClr val="EAF2FB"/>
+            <a:srgbClr val="0B3C6C"/>
           </a:solidFill>
           <a:ln>
             <a:noFill/>
@@ -7205,57 +7084,14 @@
       </p:sp>
       <p:sp>
         <p:nvSpPr>
-          <p:cNvPr id="3" name="Rectangle 2"/>
-          <p:cNvSpPr/>
-          <p:nvPr/>
-        </p:nvSpPr>
-        <p:spPr>
-          <a:xfrm>
-            <a:off x="0" y="0"/>
-            <a:ext cx="12191695" cy="1188720"/>
-          </a:xfrm>
-          <a:prstGeom prst="rect">
-            <a:avLst/>
-          </a:prstGeom>
-          <a:solidFill>
-            <a:srgbClr val="0B3C6C"/>
-          </a:solidFill>
-          <a:ln>
-            <a:noFill/>
-          </a:ln>
-        </p:spPr>
-        <p:style>
-          <a:lnRef idx="1">
-            <a:schemeClr val="accent1"/>
-          </a:lnRef>
-          <a:fillRef idx="3">
-            <a:schemeClr val="accent1"/>
-          </a:fillRef>
-          <a:effectRef idx="2">
-            <a:schemeClr val="accent1"/>
-          </a:effectRef>
-          <a:fontRef idx="minor">
-            <a:schemeClr val="lt1"/>
-          </a:fontRef>
-        </p:style>
-        <p:txBody>
-          <a:bodyPr rtlCol="0" anchor="ctr"/>
-          <a:lstStyle/>
-          <a:p>
-            <a:pPr algn="ctr"/>
-          </a:p>
-        </p:txBody>
-      </p:sp>
-      <p:sp>
-        <p:nvSpPr>
-          <p:cNvPr id="4" name="TextBox 3"/>
+          <p:cNvPr id="3" name="TextBox 2"/>
           <p:cNvSpPr txBox="1"/>
           <p:nvPr/>
         </p:nvSpPr>
         <p:spPr>
           <a:xfrm>
-            <a:off x="457200" y="164592"/>
-            <a:ext cx="8686800" cy="822960"/>
+            <a:off x="548640" y="2103120"/>
+            <a:ext cx="10972800" cy="1097280"/>
           </a:xfrm>
           <a:prstGeom prst="rect">
             <a:avLst/>
@@ -7268,29 +7104,29 @@
           </a:bodyPr>
           <a:lstStyle/>
           <a:p>
-            <a:pPr algn="l"/>
-            <a:r>
-              <a:rPr sz="3600" b="1">
+            <a:pPr algn="ctr"/>
+            <a:r>
+              <a:rPr sz="5200" b="1">
                 <a:solidFill>
                   <a:srgbClr val="FFFFFF"/>
                 </a:solidFill>
                 <a:latin typeface="Calibri"/>
               </a:rPr>
-              <a:t>Exit Ticket</a:t>
-            </a:r>
-          </a:p>
-        </p:txBody>
-      </p:sp>
-      <p:sp>
-        <p:nvSpPr>
-          <p:cNvPr id="5" name="TextBox 4"/>
+              <a:t>Nice work.</a:t>
+            </a:r>
+          </a:p>
+        </p:txBody>
+      </p:sp>
+      <p:sp>
+        <p:nvSpPr>
+          <p:cNvPr id="4" name="TextBox 3"/>
           <p:cNvSpPr txBox="1"/>
           <p:nvPr/>
         </p:nvSpPr>
         <p:spPr>
           <a:xfrm>
-            <a:off x="457200" y="749808"/>
-            <a:ext cx="8229600" cy="320040"/>
+            <a:off x="548640" y="3749039"/>
+            <a:ext cx="10972800" cy="1828800"/>
           </a:xfrm>
           <a:prstGeom prst="rect">
             <a:avLst/>
@@ -7303,201 +7139,23 @@
           </a:bodyPr>
           <a:lstStyle/>
           <a:p>
-            <a:pPr algn="l"/>
-            <a:r>
-              <a:rPr sz="1400" b="0">
-                <a:solidFill>
-                  <a:srgbClr val="CCDDEE"/>
-                </a:solidFill>
-                <a:latin typeface="Calibri"/>
-              </a:rPr>
-              <a:t>Phase 8/8  ·  Algebra 2  ·  Lesson 3-5  ·  Day 3</a:t>
-            </a:r>
-          </a:p>
-        </p:txBody>
-      </p:sp>
-      <p:sp>
-        <p:nvSpPr>
-          <p:cNvPr id="6" name="Rounded Rectangle 5"/>
-          <p:cNvSpPr/>
-          <p:nvPr/>
-        </p:nvSpPr>
-        <p:spPr>
-          <a:xfrm>
-            <a:off x="9418320" y="365760"/>
-            <a:ext cx="1362456" cy="320040"/>
-          </a:xfrm>
-          <a:prstGeom prst="roundRect">
-            <a:avLst>
-              <a:gd name="adj" fmla="val 50000"/>
-            </a:avLst>
-          </a:prstGeom>
-          <a:solidFill>
-            <a:srgbClr val="223344"/>
-          </a:solidFill>
-          <a:ln>
-            <a:noFill/>
-          </a:ln>
-        </p:spPr>
-        <p:style>
-          <a:lnRef idx="1">
-            <a:schemeClr val="accent1"/>
-          </a:lnRef>
-          <a:fillRef idx="3">
-            <a:schemeClr val="accent1"/>
-          </a:fillRef>
-          <a:effectRef idx="2">
-            <a:schemeClr val="accent1"/>
-          </a:effectRef>
-          <a:fontRef idx="minor">
-            <a:schemeClr val="lt1"/>
-          </a:fontRef>
-        </p:style>
-        <p:txBody>
-          <a:bodyPr rtlCol="0" anchor="ctr" lIns="73152" rIns="73152" tIns="18288" bIns="18288"/>
-          <a:lstStyle/>
-          <a:p>
             <a:pPr algn="ctr"/>
             <a:r>
-              <a:rPr sz="1100" b="1">
-                <a:solidFill>
-                  <a:srgbClr val="FFFFFF"/>
-                </a:solidFill>
-                <a:latin typeface="Calibri"/>
-              </a:rPr>
-              <a:t>Exit Ticket</a:t>
-            </a:r>
-          </a:p>
-        </p:txBody>
-      </p:sp>
-      <p:sp>
-        <p:nvSpPr>
-          <p:cNvPr id="7" name="Rounded Rectangle 6"/>
-          <p:cNvSpPr/>
-          <p:nvPr/>
-        </p:nvSpPr>
-        <p:spPr>
-          <a:xfrm>
-            <a:off x="10853928" y="365760"/>
-            <a:ext cx="758952" cy="320040"/>
-          </a:xfrm>
-          <a:prstGeom prst="roundRect">
-            <a:avLst>
-              <a:gd name="adj" fmla="val 50000"/>
-            </a:avLst>
-          </a:prstGeom>
-          <a:solidFill>
-            <a:srgbClr val="1E6FC8"/>
-          </a:solidFill>
-          <a:ln>
-            <a:noFill/>
-          </a:ln>
-        </p:spPr>
-        <p:style>
-          <a:lnRef idx="1">
-            <a:schemeClr val="accent1"/>
-          </a:lnRef>
-          <a:fillRef idx="3">
-            <a:schemeClr val="accent1"/>
-          </a:fillRef>
-          <a:effectRef idx="2">
-            <a:schemeClr val="accent1"/>
-          </a:effectRef>
-          <a:fontRef idx="minor">
-            <a:schemeClr val="lt1"/>
-          </a:fontRef>
-        </p:style>
-        <p:txBody>
-          <a:bodyPr rtlCol="0" anchor="ctr" lIns="73152" rIns="73152" tIns="18288" bIns="18288"/>
-          <a:lstStyle/>
+              <a:rPr sz="2200" b="0">
+                <a:solidFill>
+                  <a:srgbClr val="DDEEFF"/>
+                </a:solidFill>
+                <a:latin typeface="Calibri"/>
+              </a:rPr>
+              <a:t>Collect:  Exit Ticket  ·  Do Now sheet  ·  Tonya error analysis</a:t>
+            </a:r>
+          </a:p>
           <a:p>
             <a:pPr algn="ctr"/>
             <a:r>
-              <a:rPr sz="1100" b="1">
-                <a:solidFill>
-                  <a:srgbClr val="FFFFFF"/>
-                </a:solidFill>
-                <a:latin typeface="Calibri"/>
-              </a:rPr>
-              <a:t>DOK 2</a:t>
-            </a:r>
-          </a:p>
-        </p:txBody>
-      </p:sp>
-      <p:sp>
-        <p:nvSpPr>
-          <p:cNvPr id="8" name="TextBox 7"/>
-          <p:cNvSpPr txBox="1"/>
-          <p:nvPr/>
-        </p:nvSpPr>
-        <p:spPr>
-          <a:xfrm>
-            <a:off x="9418320" y="777240"/>
-            <a:ext cx="2286000" cy="320040"/>
-          </a:xfrm>
-          <a:prstGeom prst="rect">
-            <a:avLst/>
-          </a:prstGeom>
-          <a:noFill/>
-        </p:spPr>
-        <p:txBody>
-          <a:bodyPr wrap="square">
-            <a:spAutoFit/>
-          </a:bodyPr>
-          <a:lstStyle/>
-          <a:p>
-            <a:pPr algn="l"/>
-            <a:r>
-              <a:rPr sz="1400" b="1">
-                <a:solidFill>
-                  <a:srgbClr val="CCDDEE"/>
-                </a:solidFill>
-                <a:latin typeface="Calibri"/>
-              </a:rPr>
-              <a:t>4 min</a:t>
-            </a:r>
-          </a:p>
-        </p:txBody>
-      </p:sp>
-      <p:sp>
-        <p:nvSpPr>
-          <p:cNvPr id="9" name="TextBox 8"/>
-          <p:cNvSpPr txBox="1"/>
-          <p:nvPr/>
-        </p:nvSpPr>
-        <p:spPr>
-          <a:xfrm>
-            <a:off x="548640" y="1463040"/>
-            <a:ext cx="11064240" cy="4846320"/>
-          </a:xfrm>
-          <a:prstGeom prst="rect">
-            <a:avLst/>
-          </a:prstGeom>
-          <a:noFill/>
-        </p:spPr>
-        <p:txBody>
-          <a:bodyPr wrap="square">
-            <a:spAutoFit/>
-          </a:bodyPr>
-          <a:lstStyle/>
-          <a:p>
-            <a:pPr algn="l"/>
-            <a:r>
-              <a:rPr sz="2600" b="0">
-                <a:solidFill>
-                  <a:srgbClr val="112233"/>
-                </a:solidFill>
-                <a:latin typeface="Calibri"/>
-              </a:rPr>
-              <a:t>For  p(x) = (x + 2)³ (x − 1)² (x − 4):</a:t>
-            </a:r>
-          </a:p>
-          <a:p>
-            <a:pPr algn="l"/>
-            <a:r>
-              <a:rPr sz="2600" b="0">
-                <a:solidFill>
-                  <a:srgbClr val="112233"/>
+              <a:rPr sz="2200" b="0">
+                <a:solidFill>
+                  <a:srgbClr val="DDEEFF"/>
                 </a:solidFill>
                 <a:latin typeface="Calibri"/>
               </a:rPr>
@@ -7505,153 +7163,15 @@
             </a:r>
           </a:p>
           <a:p>
-            <a:pPr algn="l"/>
-            <a:r>
-              <a:rPr sz="2600" b="0">
-                <a:solidFill>
-                  <a:srgbClr val="112233"/>
-                </a:solidFill>
-                <a:latin typeface="Calibri"/>
-              </a:rPr>
-              <a:t>(a)  List each zero and its MULTIPLICITY.</a:t>
-            </a:r>
-          </a:p>
-          <a:p>
-            <a:pPr algn="l"/>
-            <a:r>
-              <a:rPr sz="2600" b="0">
-                <a:solidFill>
-                  <a:srgbClr val="112233"/>
-                </a:solidFill>
-                <a:latin typeface="Calibri"/>
-              </a:rPr>
-              <a:t>(b)  Predict the behavior (cross / touch / flatten-through) at each.</a:t>
-            </a:r>
-          </a:p>
-          <a:p>
-            <a:pPr algn="l"/>
-            <a:r>
-              <a:rPr sz="2600" b="0">
-                <a:solidFill>
-                  <a:srgbClr val="112233"/>
-                </a:solidFill>
-                <a:latin typeface="Calibri"/>
-              </a:rPr>
-              <a:t>(c)  In ONE sentence, explain how multiplicity told you the behavior —</a:t>
-            </a:r>
-          </a:p>
-          <a:p>
-            <a:pPr algn="l"/>
-            <a:r>
-              <a:rPr sz="2600" b="0">
-                <a:solidFill>
-                  <a:srgbClr val="112233"/>
-                </a:solidFill>
-                <a:latin typeface="Calibri"/>
-              </a:rPr>
-              <a:t>       use the frame.</a:t>
-            </a:r>
-          </a:p>
-          <a:p>
-            <a:pPr algn="l"/>
-            <a:r>
-              <a:rPr sz="2600" b="0">
-                <a:solidFill>
-                  <a:srgbClr val="112233"/>
-                </a:solidFill>
-                <a:latin typeface="Calibri"/>
-              </a:rPr>
-              <a:t/>
-            </a:r>
-          </a:p>
-          <a:p>
-            <a:pPr algn="l"/>
-            <a:r>
-              <a:rPr sz="2600" b="0">
-                <a:solidFill>
-                  <a:srgbClr val="112233"/>
-                </a:solidFill>
-                <a:latin typeface="Calibri"/>
-              </a:rPr>
-              <a:t>Put your packet on the front desk as you leave.</a:t>
-            </a:r>
-          </a:p>
-        </p:txBody>
-      </p:sp>
-      <p:sp>
-        <p:nvSpPr>
-          <p:cNvPr id="10" name="Rectangle 9"/>
-          <p:cNvSpPr/>
-          <p:nvPr/>
-        </p:nvSpPr>
-        <p:spPr>
-          <a:xfrm>
-            <a:off x="0" y="6263640"/>
-            <a:ext cx="12191695" cy="594360"/>
-          </a:xfrm>
-          <a:prstGeom prst="rect">
-            <a:avLst/>
-          </a:prstGeom>
-          <a:solidFill>
-            <a:srgbClr val="D94E2F"/>
-          </a:solidFill>
-          <a:ln>
-            <a:noFill/>
-          </a:ln>
-        </p:spPr>
-        <p:style>
-          <a:lnRef idx="1">
-            <a:schemeClr val="accent1"/>
-          </a:lnRef>
-          <a:fillRef idx="3">
-            <a:schemeClr val="accent1"/>
-          </a:fillRef>
-          <a:effectRef idx="2">
-            <a:schemeClr val="accent1"/>
-          </a:effectRef>
-          <a:fontRef idx="minor">
-            <a:schemeClr val="lt1"/>
-          </a:fontRef>
-        </p:style>
-        <p:txBody>
-          <a:bodyPr rtlCol="0" anchor="ctr"/>
-          <a:lstStyle/>
-          <a:p>
             <a:pPr algn="ctr"/>
-          </a:p>
-        </p:txBody>
-      </p:sp>
-      <p:sp>
-        <p:nvSpPr>
-          <p:cNvPr id="11" name="TextBox 10"/>
-          <p:cNvSpPr txBox="1"/>
-          <p:nvPr/>
-        </p:nvSpPr>
-        <p:spPr>
-          <a:xfrm>
-            <a:off x="457200" y="6327648"/>
-            <a:ext cx="11247120" cy="457200"/>
-          </a:xfrm>
-          <a:prstGeom prst="rect">
-            <a:avLst/>
-          </a:prstGeom>
-          <a:noFill/>
-        </p:spPr>
-        <p:txBody>
-          <a:bodyPr wrap="square">
-            <a:spAutoFit/>
-          </a:bodyPr>
-          <a:lstStyle/>
-          <a:p>
-            <a:pPr algn="l"/>
-            <a:r>
-              <a:rPr sz="1400" b="1">
-                <a:solidFill>
-                  <a:srgbClr val="FFFFFF"/>
-                </a:solidFill>
-                <a:latin typeface="Calibri"/>
-              </a:rPr>
-              <a:t>Packets to the front. Pack up. See you next class.</a:t>
+            <a:r>
+              <a:rPr sz="2200" b="0">
+                <a:solidFill>
+                  <a:srgbClr val="DDEEFF"/>
+                </a:solidFill>
+                <a:latin typeface="Calibri"/>
+              </a:rPr>
+              <a:t>Day 4 preview:  real vs. complex zeros — what if we can’t factor over the reals?</a:t>
             </a:r>
           </a:p>
         </p:txBody>
